--- a/prez/Math-website.pptx
+++ b/prez/Math-website.pptx
@@ -4098,7 +4098,7 @@
               <a:rPr lang="ru-RU" sz="2800" b="1" dirty="0">
                 <a:latin typeface="Consolas" panose="020B0609020204030204" pitchFamily="49" charset="0"/>
               </a:rPr>
-              <a:t>- 10 секунд – 1 запрос</a:t>
+              <a:t>- 15 секунд – 1 запрос к ИИ</a:t>
             </a:r>
             <a:endParaRPr lang="ru-RU" sz="2800" b="0" dirty="0">
               <a:effectLst/>
